--- a/slides/Module_03_Context_Engineering.pptx
+++ b/slides/Module_03_Context_Engineering.pptx
@@ -7071,7 +7071,7 @@
                   <a:srgbClr val="D4E4F0"/>
                 </a:solidFill>
               </a:rPr>
-              <a:t>Context engineering is the art and science of deciding what goes into the agent’s context window, when, and in what form — to maximise useful work per token.</a:t>
+              <a:t>Context engineering is the art and science of deciding what goes into the agent’s context window, when, and in what form — to maximize useful work per token.</a:t>
             </a:r>
             <a:endParaRPr lang="en-US" sz="1100" dirty="0"/>
           </a:p>
@@ -7506,7 +7506,7 @@
                   <a:srgbClr val="D4E4F0"/>
                 </a:solidFill>
               </a:rPr>
-              <a:t>Anthropic: “The folder and file structure of an agent becomes a form of context engineering.” How you organise your project IS how you communicate intent to the agent.</a:t>
+              <a:t>Anthropic: “The folder and file structure of an agent becomes a form of context engineering.” How you organize your project IS how you communicate intent to the agent.</a:t>
             </a:r>
             <a:endParaRPr lang="en-US" sz="1100" dirty="0"/>
           </a:p>
@@ -13067,7 +13067,7 @@
                   <a:srgbClr val="FFFFFF"/>
                 </a:solidFill>
               </a:rPr>
-              <a:t>✓  WHAT TO KEEP  (maximise recall)</a:t>
+              <a:t>✓  WHAT TO KEEP  (maximize recall)</a:t>
             </a:r>
             <a:endParaRPr lang="en-US" sz="1100" dirty="0"/>
           </a:p>
